--- a/Agentic-QA-Pipeline-Presentation.pptx
+++ b/Agentic-QA-Pipeline-Presentation.pptx
@@ -12,6 +12,7 @@
     <p:sldId id="260" r:id="rId6"/>
     <p:sldId id="261" r:id="rId7"/>
     <p:sldId id="262" r:id="rId8"/>
+    <p:sldId id="264" r:id="rId15"/>
     <p:sldId id="263" r:id="rId9"/>
   </p:sldIdLst>
   <p:notesMasterIdLst>
@@ -3174,7 +3175,7 @@
                 <a:ea typeface="Consolas" pitchFamily="34" charset="-122"/>
                 <a:cs typeface="Consolas" pitchFamily="34" charset="-120"/>
               </a:rPr>
-              <a:t>2 / 8</a:t>
+              <a:t>2 / 9</a:t>
             </a:r>
             <a:endParaRPr lang="en-US" sz="850" dirty="0"/>
           </a:p>
@@ -3978,7 +3979,7 @@
                 <a:ea typeface="Consolas" pitchFamily="34" charset="-122"/>
                 <a:cs typeface="Consolas" pitchFamily="34" charset="-120"/>
               </a:rPr>
-              <a:t>3 / 8</a:t>
+              <a:t>3 / 9</a:t>
             </a:r>
             <a:endParaRPr lang="en-US" sz="850" dirty="0"/>
           </a:p>
@@ -5073,7 +5074,7 @@
                 <a:ea typeface="Consolas" pitchFamily="34" charset="-122"/>
                 <a:cs typeface="Consolas" pitchFamily="34" charset="-120"/>
               </a:rPr>
-              <a:t>4 / 8</a:t>
+              <a:t>4 / 9</a:t>
             </a:r>
             <a:endParaRPr lang="en-US" sz="850" dirty="0"/>
           </a:p>
@@ -5877,7 +5878,7 @@
                 <a:ea typeface="Consolas" pitchFamily="34" charset="-122"/>
                 <a:cs typeface="Consolas" pitchFamily="34" charset="-120"/>
               </a:rPr>
-              <a:t>5 / 8</a:t>
+              <a:t>5 / 9</a:t>
             </a:r>
             <a:endParaRPr lang="en-US" sz="850" dirty="0"/>
           </a:p>
@@ -6761,7 +6762,7 @@
                 <a:ea typeface="Consolas" pitchFamily="34" charset="-122"/>
                 <a:cs typeface="Consolas" pitchFamily="34" charset="-120"/>
               </a:rPr>
-              <a:t>6 / 8</a:t>
+              <a:t>6 / 9</a:t>
             </a:r>
             <a:endParaRPr lang="en-US" sz="850" dirty="0"/>
           </a:p>
@@ -7585,7 +7586,7 @@
                 <a:ea typeface="Consolas" pitchFamily="34" charset="-122"/>
                 <a:cs typeface="Consolas" pitchFamily="34" charset="-120"/>
               </a:rPr>
-              <a:t>7 / 8</a:t>
+              <a:t>7 / 9</a:t>
             </a:r>
             <a:endParaRPr lang="en-US" sz="850" dirty="0"/>
           </a:p>
@@ -7676,7 +7677,7 @@
                 <a:ea typeface="Consolas" pitchFamily="34" charset="-122"/>
                 <a:cs typeface="Consolas" pitchFamily="34" charset="-120"/>
               </a:rPr>
-              <a:t>07</a:t>
+              <a:t>08</a:t>
             </a:r>
             <a:endParaRPr lang="en-US" sz="1600" dirty="0"/>
           </a:p>
@@ -8390,7 +8391,1015 @@
                 <a:ea typeface="Consolas" pitchFamily="34" charset="-122"/>
                 <a:cs typeface="Consolas" pitchFamily="34" charset="-120"/>
               </a:rPr>
-              <a:t>8 / 8</a:t>
+              <a:t>9 / 9</a:t>
+            </a:r>
+            <a:endParaRPr lang="en-US" sz="850" dirty="0"/>
+          </a:p>
+        </p:txBody>
+      </p:sp>
+    </p:spTree>
+  </p:cSld>
+  <p:clrMapOvr>
+    <a:masterClrMapping/>
+  </p:clrMapOvr>
+</p:sld>
+</file>
+
+<file path=ppt/slides/slide9.xml><?xml version="1.0" encoding="utf-8"?>
+<p:sld xmlns:a="http://schemas.openxmlformats.org/drawingml/2006/main" xmlns:r="http://schemas.openxmlformats.org/officeDocument/2006/relationships" xmlns:p="http://schemas.openxmlformats.org/presentationml/2006/main">
+  <p:cSld name="Slide 9">
+    <p:bg>
+      <p:bgPr>
+        <a:solidFill>
+          <a:srgbClr val="0B1220"/>
+        </a:solidFill>
+      </p:bgPr>
+    </p:bg>
+    <p:spTree>
+      <p:nvGrpSpPr>
+        <p:cNvPr id="1" name=""/>
+        <p:cNvGrpSpPr/>
+        <p:nvPr/>
+      </p:nvGrpSpPr>
+      <p:grpSpPr>
+        <a:xfrm>
+          <a:off x="0" y="0"/>
+          <a:ext cx="0" cy="0"/>
+          <a:chOff x="0" y="0"/>
+          <a:chExt cx="0" cy="0"/>
+        </a:xfrm>
+      </p:grpSpPr>
+      <p:sp>
+        <p:nvSpPr>
+          <p:cNvPr id="3" name="Shape 3"/>
+          <p:cNvSpPr/>
+          <p:nvPr/>
+        </p:nvSpPr>
+        <p:spPr>
+          <a:xfrm>
+            <a:off x="0" y="0"/>
+            <a:ext cx="64008" cy="5148072"/>
+          </a:xfrm>
+          <a:prstGeom prst="rect">
+            <a:avLst/>
+          </a:prstGeom>
+          <a:solidFill>
+            <a:srgbClr val="35E0A1"/>
+          </a:solidFill>
+          <a:ln/>
+        </p:spPr>
+      </p:sp>
+      <p:sp>
+        <p:nvSpPr>
+          <p:cNvPr id="4" name="Text 4"/>
+          <p:cNvSpPr/>
+          <p:nvPr/>
+        </p:nvSpPr>
+        <p:spPr>
+          <a:xfrm>
+            <a:off x="411480" y="320040"/>
+            <a:ext cx="640080" cy="365760"/>
+          </a:xfrm>
+          <a:prstGeom prst="rect">
+            <a:avLst/>
+          </a:prstGeom>
+          <a:noFill/>
+          <a:ln/>
+        </p:spPr>
+        <p:txBody>
+          <a:bodyPr wrap="square" rtlCol="0" anchor="ctr"/>
+          <a:lstStyle/>
+          <a:p>
+            <a:pPr indent="0" marL="0">
+              <a:buNone/>
+            </a:pPr>
+            <a:r>
+              <a:rPr lang="en-US" sz="1600" b="1" dirty="0">
+                <a:solidFill>
+                  <a:srgbClr val="35E0A1"/>
+                </a:solidFill>
+                <a:latin typeface="Consolas" pitchFamily="34" charset="0"/>
+                <a:ea typeface="Consolas" pitchFamily="34" charset="-122"/>
+                <a:cs typeface="Consolas" pitchFamily="34" charset="-120"/>
+              </a:rPr>
+              <a:t>07</a:t>
+            </a:r>
+            <a:endParaRPr lang="en-US" sz="1600" dirty="0"/>
+          </a:p>
+        </p:txBody>
+      </p:sp>
+      <p:sp>
+        <p:nvSpPr>
+          <p:cNvPr id="5" name="Text 5"/>
+          <p:cNvSpPr/>
+          <p:nvPr/>
+        </p:nvSpPr>
+        <p:spPr>
+          <a:xfrm>
+            <a:off x="411480" y="621792"/>
+            <a:ext cx="8321040" cy="548640"/>
+          </a:xfrm>
+          <a:prstGeom prst="rect">
+            <a:avLst/>
+          </a:prstGeom>
+          <a:noFill/>
+          <a:ln/>
+        </p:spPr>
+        <p:txBody>
+          <a:bodyPr wrap="square" rtlCol="0" anchor="ctr"/>
+          <a:lstStyle/>
+          <a:p>
+            <a:pPr indent="0" marL="0">
+              <a:buNone/>
+            </a:pPr>
+            <a:r>
+              <a:rPr lang="en-US" sz="2700" b="1" dirty="0">
+                <a:solidFill>
+                  <a:srgbClr val="F5F8FC"/>
+                </a:solidFill>
+                <a:latin typeface="Segoe UI" pitchFamily="34" charset="0"/>
+                <a:ea typeface="Segoe UI" pitchFamily="34" charset="-122"/>
+                <a:cs typeface="Segoe UI" pitchFamily="34" charset="-120"/>
+              </a:rPr>
+              <a:t>What we built it with</a:t>
+            </a:r>
+            <a:endParaRPr lang="en-US" sz="2700" dirty="0"/>
+          </a:p>
+        </p:txBody>
+      </p:sp>
+      <p:sp>
+        <p:nvSpPr>
+          <p:cNvPr id="6" name="Shape 6"/>
+          <p:cNvSpPr/>
+          <p:nvPr/>
+        </p:nvSpPr>
+        <p:spPr>
+          <a:xfrm>
+            <a:off x="429768" y="1207008"/>
+            <a:ext cx="777240" cy="36576"/>
+          </a:xfrm>
+          <a:prstGeom prst="rect">
+            <a:avLst/>
+          </a:prstGeom>
+          <a:solidFill>
+            <a:srgbClr val="35E0A1"/>
+          </a:solidFill>
+          <a:ln/>
+        </p:spPr>
+      </p:sp>
+      <p:sp>
+        <p:nvSpPr>
+          <p:cNvPr id="7" name="Shape 7"/>
+          <p:cNvSpPr/>
+          <p:nvPr/>
+        </p:nvSpPr>
+        <p:spPr>
+          <a:xfrm>
+            <a:off x="411480" y="1463040"/>
+            <a:ext cx="4096512" cy="3090672"/>
+          </a:xfrm>
+          <a:prstGeom prst="roundRect">
+            <a:avLst>
+              <a:gd name="adj" fmla="val 5625"/>
+            </a:avLst>
+          </a:prstGeom>
+          <a:solidFill>
+            <a:srgbClr val="131D30"/>
+          </a:solidFill>
+          <a:ln w="12700">
+            <a:solidFill>
+              <a:srgbClr val="2A3A55"/>
+            </a:solidFill>
+            <a:prstDash val="solid"/>
+          </a:ln>
+        </p:spPr>
+      </p:sp>
+      <p:sp>
+        <p:nvSpPr>
+          <p:cNvPr id="8" name="Text 8"/>
+          <p:cNvSpPr/>
+          <p:nvPr/>
+        </p:nvSpPr>
+        <p:spPr>
+          <a:xfrm>
+            <a:off x="667512" y="1627632"/>
+            <a:ext cx="3584448" cy="256032"/>
+          </a:xfrm>
+          <a:prstGeom prst="rect">
+            <a:avLst/>
+          </a:prstGeom>
+          <a:noFill/>
+          <a:ln/>
+        </p:spPr>
+        <p:txBody>
+          <a:bodyPr wrap="square" rtlCol="0" anchor="ctr"/>
+          <a:lstStyle/>
+          <a:p>
+            <a:pPr indent="0" marL="0">
+              <a:buNone/>
+            </a:pPr>
+            <a:r>
+              <a:rPr lang="en-US" sz="1000" b="1" dirty="0">
+                <a:solidFill>
+                  <a:srgbClr val="35E0A1"/>
+                </a:solidFill>
+                <a:latin typeface="Segoe UI" pitchFamily="34" charset="0"/>
+                <a:ea typeface="Segoe UI" pitchFamily="34" charset="-122"/>
+                <a:cs typeface="Segoe UI" pitchFamily="34" charset="-120"/>
+              </a:rPr>
+              <a:t>THE AI</a:t>
+            </a:r>
+            <a:endParaRPr lang="en-US" sz="1000" dirty="0"/>
+          </a:p>
+        </p:txBody>
+      </p:sp>
+      <p:sp>
+        <p:nvSpPr>
+          <p:cNvPr id="9" name="Text 9"/>
+          <p:cNvSpPr/>
+          <p:nvPr/>
+        </p:nvSpPr>
+        <p:spPr>
+          <a:xfrm>
+            <a:off x="667512" y="2048256"/>
+            <a:ext cx="3584448" cy="237744"/>
+          </a:xfrm>
+          <a:prstGeom prst="rect">
+            <a:avLst/>
+          </a:prstGeom>
+          <a:noFill/>
+          <a:ln/>
+        </p:spPr>
+        <p:txBody>
+          <a:bodyPr wrap="square" rtlCol="0" anchor="t"/>
+          <a:lstStyle/>
+          <a:p>
+            <a:pPr indent="0" marL="0">
+              <a:buNone/>
+            </a:pPr>
+            <a:r>
+              <a:rPr lang="en-US" sz="1250" b="1" dirty="0">
+                <a:solidFill>
+                  <a:srgbClr val="F5F8FC"/>
+                </a:solidFill>
+                <a:latin typeface="Segoe UI" pitchFamily="34" charset="0"/>
+                <a:ea typeface="Segoe UI" pitchFamily="34" charset="-122"/>
+                <a:cs typeface="Segoe UI" pitchFamily="34" charset="-120"/>
+              </a:rPr>
+              <a:t>Claude Code</a:t>
+            </a:r>
+            <a:endParaRPr lang="en-US" sz="1250" dirty="0"/>
+          </a:p>
+        </p:txBody>
+      </p:sp>
+      <p:sp>
+        <p:nvSpPr>
+          <p:cNvPr id="10" name="Text 10"/>
+          <p:cNvSpPr/>
+          <p:nvPr/>
+        </p:nvSpPr>
+        <p:spPr>
+          <a:xfrm>
+            <a:off x="667512" y="2295144"/>
+            <a:ext cx="3584448" cy="292608"/>
+          </a:xfrm>
+          <a:prstGeom prst="rect">
+            <a:avLst/>
+          </a:prstGeom>
+          <a:noFill/>
+          <a:ln/>
+        </p:spPr>
+        <p:txBody>
+          <a:bodyPr wrap="square" rtlCol="0" anchor="t"/>
+          <a:lstStyle/>
+          <a:p>
+            <a:pPr indent="0" marL="0">
+              <a:lnSpc>
+                <a:spcPct val="110000"/>
+              </a:lnSpc>
+              <a:buNone/>
+            </a:pPr>
+            <a:r>
+              <a:rPr lang="en-US" sz="1000" dirty="0">
+                <a:solidFill>
+                  <a:srgbClr val="AEBBD0"/>
+                </a:solidFill>
+                <a:latin typeface="Segoe UI" pitchFamily="34" charset="0"/>
+                <a:ea typeface="Segoe UI" pitchFamily="34" charset="-122"/>
+                <a:cs typeface="Segoe UI" pitchFamily="34" charset="-120"/>
+              </a:rPr>
+              <a:t>Writes the tests and fixes broken ones.</a:t>
+            </a:r>
+            <a:endParaRPr lang="en-US" sz="1000" dirty="0"/>
+          </a:p>
+        </p:txBody>
+      </p:sp>
+      <p:sp>
+        <p:nvSpPr>
+          <p:cNvPr id="11" name="Text 11"/>
+          <p:cNvSpPr/>
+          <p:nvPr/>
+        </p:nvSpPr>
+        <p:spPr>
+          <a:xfrm>
+            <a:off x="667512" y="2633472"/>
+            <a:ext cx="3584448" cy="237744"/>
+          </a:xfrm>
+          <a:prstGeom prst="rect">
+            <a:avLst/>
+          </a:prstGeom>
+          <a:noFill/>
+          <a:ln/>
+        </p:spPr>
+        <p:txBody>
+          <a:bodyPr wrap="square" rtlCol="0" anchor="t"/>
+          <a:lstStyle/>
+          <a:p>
+            <a:pPr indent="0" marL="0">
+              <a:buNone/>
+            </a:pPr>
+            <a:r>
+              <a:rPr lang="en-US" sz="1250" b="1" dirty="0">
+                <a:solidFill>
+                  <a:srgbClr val="F5F8FC"/>
+                </a:solidFill>
+                <a:latin typeface="Segoe UI" pitchFamily="34" charset="0"/>
+                <a:ea typeface="Segoe UI" pitchFamily="34" charset="-122"/>
+                <a:cs typeface="Segoe UI" pitchFamily="34" charset="-120"/>
+              </a:rPr>
+              <a:t>Planner · Writer · Fixer</a:t>
+            </a:r>
+            <a:endParaRPr lang="en-US" sz="1250" dirty="0"/>
+          </a:p>
+        </p:txBody>
+      </p:sp>
+      <p:sp>
+        <p:nvSpPr>
+          <p:cNvPr id="12" name="Text 12"/>
+          <p:cNvSpPr/>
+          <p:nvPr/>
+        </p:nvSpPr>
+        <p:spPr>
+          <a:xfrm>
+            <a:off x="667512" y="2880360"/>
+            <a:ext cx="3584448" cy="292608"/>
+          </a:xfrm>
+          <a:prstGeom prst="rect">
+            <a:avLst/>
+          </a:prstGeom>
+          <a:noFill/>
+          <a:ln/>
+        </p:spPr>
+        <p:txBody>
+          <a:bodyPr wrap="square" rtlCol="0" anchor="t"/>
+          <a:lstStyle/>
+          <a:p>
+            <a:pPr indent="0" marL="0">
+              <a:lnSpc>
+                <a:spcPct val="110000"/>
+              </a:lnSpc>
+              <a:buNone/>
+            </a:pPr>
+            <a:r>
+              <a:rPr lang="en-US" sz="1000" dirty="0">
+                <a:solidFill>
+                  <a:srgbClr val="AEBBD0"/>
+                </a:solidFill>
+                <a:latin typeface="Segoe UI" pitchFamily="34" charset="0"/>
+                <a:ea typeface="Segoe UI" pitchFamily="34" charset="-122"/>
+                <a:cs typeface="Segoe UI" pitchFamily="34" charset="-120"/>
+              </a:rPr>
+              <a:t>Three agents, each with one job.</a:t>
+            </a:r>
+            <a:endParaRPr lang="en-US" sz="1000" dirty="0"/>
+          </a:p>
+        </p:txBody>
+      </p:sp>
+      <p:sp>
+        <p:nvSpPr>
+          <p:cNvPr id="13" name="Text 13"/>
+          <p:cNvSpPr/>
+          <p:nvPr/>
+        </p:nvSpPr>
+        <p:spPr>
+          <a:xfrm>
+            <a:off x="667512" y="3218688"/>
+            <a:ext cx="3584448" cy="237744"/>
+          </a:xfrm>
+          <a:prstGeom prst="rect">
+            <a:avLst/>
+          </a:prstGeom>
+          <a:noFill/>
+          <a:ln/>
+        </p:spPr>
+        <p:txBody>
+          <a:bodyPr wrap="square" rtlCol="0" anchor="t"/>
+          <a:lstStyle/>
+          <a:p>
+            <a:pPr indent="0" marL="0">
+              <a:buNone/>
+            </a:pPr>
+            <a:r>
+              <a:rPr lang="en-US" sz="1250" b="1" dirty="0">
+                <a:solidFill>
+                  <a:srgbClr val="F5F8FC"/>
+                </a:solidFill>
+                <a:latin typeface="Segoe UI" pitchFamily="34" charset="0"/>
+                <a:ea typeface="Segoe UI" pitchFamily="34" charset="-122"/>
+                <a:cs typeface="Segoe UI" pitchFamily="34" charset="-120"/>
+              </a:rPr>
+              <a:t>Sonnet and Haiku</a:t>
+            </a:r>
+            <a:endParaRPr lang="en-US" sz="1250" dirty="0"/>
+          </a:p>
+        </p:txBody>
+      </p:sp>
+      <p:sp>
+        <p:nvSpPr>
+          <p:cNvPr id="14" name="Text 14"/>
+          <p:cNvSpPr/>
+          <p:nvPr/>
+        </p:nvSpPr>
+        <p:spPr>
+          <a:xfrm>
+            <a:off x="667512" y="3465576"/>
+            <a:ext cx="3584448" cy="292608"/>
+          </a:xfrm>
+          <a:prstGeom prst="rect">
+            <a:avLst/>
+          </a:prstGeom>
+          <a:noFill/>
+          <a:ln/>
+        </p:spPr>
+        <p:txBody>
+          <a:bodyPr wrap="square" rtlCol="0" anchor="t"/>
+          <a:lstStyle/>
+          <a:p>
+            <a:pPr indent="0" marL="0">
+              <a:lnSpc>
+                <a:spcPct val="110000"/>
+              </a:lnSpc>
+              <a:buNone/>
+            </a:pPr>
+            <a:r>
+              <a:rPr lang="en-US" sz="1000" dirty="0">
+                <a:solidFill>
+                  <a:srgbClr val="AEBBD0"/>
+                </a:solidFill>
+                <a:latin typeface="Segoe UI" pitchFamily="34" charset="0"/>
+                <a:ea typeface="Segoe UI" pitchFamily="34" charset="-122"/>
+                <a:cs typeface="Segoe UI" pitchFamily="34" charset="-120"/>
+              </a:rPr>
+              <a:t>Sonnet writes. Haiku does quick jobs.</a:t>
+            </a:r>
+            <a:endParaRPr lang="en-US" sz="1000" dirty="0"/>
+          </a:p>
+        </p:txBody>
+      </p:sp>
+      <p:sp>
+        <p:nvSpPr>
+          <p:cNvPr id="15" name="Text 15"/>
+          <p:cNvSpPr/>
+          <p:nvPr/>
+        </p:nvSpPr>
+        <p:spPr>
+          <a:xfrm>
+            <a:off x="667512" y="3803904"/>
+            <a:ext cx="3584448" cy="237744"/>
+          </a:xfrm>
+          <a:prstGeom prst="rect">
+            <a:avLst/>
+          </a:prstGeom>
+          <a:noFill/>
+          <a:ln/>
+        </p:spPr>
+        <p:txBody>
+          <a:bodyPr wrap="square" rtlCol="0" anchor="t"/>
+          <a:lstStyle/>
+          <a:p>
+            <a:pPr indent="0" marL="0">
+              <a:buNone/>
+            </a:pPr>
+            <a:r>
+              <a:rPr lang="en-US" sz="1250" b="1" dirty="0">
+                <a:solidFill>
+                  <a:srgbClr val="F5F8FC"/>
+                </a:solidFill>
+                <a:latin typeface="Segoe UI" pitchFamily="34" charset="0"/>
+                <a:ea typeface="Segoe UI" pitchFamily="34" charset="-122"/>
+                <a:cs typeface="Segoe UI" pitchFamily="34" charset="-120"/>
+              </a:rPr>
+              <a:t>No API key</a:t>
+            </a:r>
+            <a:endParaRPr lang="en-US" sz="1250" dirty="0"/>
+          </a:p>
+        </p:txBody>
+      </p:sp>
+      <p:sp>
+        <p:nvSpPr>
+          <p:cNvPr id="16" name="Text 16"/>
+          <p:cNvSpPr/>
+          <p:nvPr/>
+        </p:nvSpPr>
+        <p:spPr>
+          <a:xfrm>
+            <a:off x="667512" y="4050792"/>
+            <a:ext cx="3584448" cy="292608"/>
+          </a:xfrm>
+          <a:prstGeom prst="rect">
+            <a:avLst/>
+          </a:prstGeom>
+          <a:noFill/>
+          <a:ln/>
+        </p:spPr>
+        <p:txBody>
+          <a:bodyPr wrap="square" rtlCol="0" anchor="t"/>
+          <a:lstStyle/>
+          <a:p>
+            <a:pPr indent="0" marL="0">
+              <a:lnSpc>
+                <a:spcPct val="110000"/>
+              </a:lnSpc>
+              <a:buNone/>
+            </a:pPr>
+            <a:r>
+              <a:rPr lang="en-US" sz="1000" dirty="0">
+                <a:solidFill>
+                  <a:srgbClr val="AEBBD0"/>
+                </a:solidFill>
+                <a:latin typeface="Segoe UI" pitchFamily="34" charset="0"/>
+                <a:ea typeface="Segoe UI" pitchFamily="34" charset="-122"/>
+                <a:cs typeface="Segoe UI" pitchFamily="34" charset="-120"/>
+              </a:rPr>
+              <a:t>Runs on the Claude app we already have.</a:t>
+            </a:r>
+            <a:endParaRPr lang="en-US" sz="1000" dirty="0"/>
+          </a:p>
+        </p:txBody>
+      </p:sp>
+      <p:sp>
+        <p:nvSpPr>
+          <p:cNvPr id="17" name="Shape 17"/>
+          <p:cNvSpPr/>
+          <p:nvPr/>
+        </p:nvSpPr>
+        <p:spPr>
+          <a:xfrm>
+            <a:off x="4636008" y="1463040"/>
+            <a:ext cx="4096512" cy="3090672"/>
+          </a:xfrm>
+          <a:prstGeom prst="roundRect">
+            <a:avLst>
+              <a:gd name="adj" fmla="val 5625"/>
+            </a:avLst>
+          </a:prstGeom>
+          <a:solidFill>
+            <a:srgbClr val="131D30"/>
+          </a:solidFill>
+          <a:ln w="12700">
+            <a:solidFill>
+              <a:srgbClr val="2A3A55"/>
+            </a:solidFill>
+            <a:prstDash val="solid"/>
+          </a:ln>
+        </p:spPr>
+      </p:sp>
+      <p:sp>
+        <p:nvSpPr>
+          <p:cNvPr id="18" name="Text 18"/>
+          <p:cNvSpPr/>
+          <p:nvPr/>
+        </p:nvSpPr>
+        <p:spPr>
+          <a:xfrm>
+            <a:off x="4892040" y="1627632"/>
+            <a:ext cx="3584448" cy="256032"/>
+          </a:xfrm>
+          <a:prstGeom prst="rect">
+            <a:avLst/>
+          </a:prstGeom>
+          <a:noFill/>
+          <a:ln/>
+        </p:spPr>
+        <p:txBody>
+          <a:bodyPr wrap="square" rtlCol="0" anchor="ctr"/>
+          <a:lstStyle/>
+          <a:p>
+            <a:pPr indent="0" marL="0">
+              <a:buNone/>
+            </a:pPr>
+            <a:r>
+              <a:rPr lang="en-US" sz="1000" b="1" dirty="0">
+                <a:solidFill>
+                  <a:srgbClr val="8B9CF9"/>
+                </a:solidFill>
+                <a:latin typeface="Segoe UI" pitchFamily="34" charset="0"/>
+                <a:ea typeface="Segoe UI" pitchFamily="34" charset="-122"/>
+                <a:cs typeface="Segoe UI" pitchFamily="34" charset="-120"/>
+              </a:rPr>
+              <a:t>THE TOOLS</a:t>
+            </a:r>
+            <a:endParaRPr lang="en-US" sz="1000" dirty="0"/>
+          </a:p>
+        </p:txBody>
+      </p:sp>
+      <p:sp>
+        <p:nvSpPr>
+          <p:cNvPr id="19" name="Text 19"/>
+          <p:cNvSpPr/>
+          <p:nvPr/>
+        </p:nvSpPr>
+        <p:spPr>
+          <a:xfrm>
+            <a:off x="4892040" y="2048256"/>
+            <a:ext cx="3584448" cy="237744"/>
+          </a:xfrm>
+          <a:prstGeom prst="rect">
+            <a:avLst/>
+          </a:prstGeom>
+          <a:noFill/>
+          <a:ln/>
+        </p:spPr>
+        <p:txBody>
+          <a:bodyPr wrap="square" rtlCol="0" anchor="t"/>
+          <a:lstStyle/>
+          <a:p>
+            <a:pPr indent="0" marL="0">
+              <a:buNone/>
+            </a:pPr>
+            <a:r>
+              <a:rPr lang="en-US" sz="1250" b="1" dirty="0">
+                <a:solidFill>
+                  <a:srgbClr val="F5F8FC"/>
+                </a:solidFill>
+                <a:latin typeface="Segoe UI" pitchFamily="34" charset="0"/>
+                <a:ea typeface="Segoe UI" pitchFamily="34" charset="-122"/>
+                <a:cs typeface="Segoe UI" pitchFamily="34" charset="-120"/>
+              </a:rPr>
+              <a:t>Playwright</a:t>
+            </a:r>
+            <a:endParaRPr lang="en-US" sz="1250" dirty="0"/>
+          </a:p>
+        </p:txBody>
+      </p:sp>
+      <p:sp>
+        <p:nvSpPr>
+          <p:cNvPr id="20" name="Text 20"/>
+          <p:cNvSpPr/>
+          <p:nvPr/>
+        </p:nvSpPr>
+        <p:spPr>
+          <a:xfrm>
+            <a:off x="4892040" y="2295144"/>
+            <a:ext cx="3584448" cy="292608"/>
+          </a:xfrm>
+          <a:prstGeom prst="rect">
+            <a:avLst/>
+          </a:prstGeom>
+          <a:noFill/>
+          <a:ln/>
+        </p:spPr>
+        <p:txBody>
+          <a:bodyPr wrap="square" rtlCol="0" anchor="t"/>
+          <a:lstStyle/>
+          <a:p>
+            <a:pPr indent="0" marL="0">
+              <a:lnSpc>
+                <a:spcPct val="110000"/>
+              </a:lnSpc>
+              <a:buNone/>
+            </a:pPr>
+            <a:r>
+              <a:rPr lang="en-US" sz="1000" dirty="0">
+                <a:solidFill>
+                  <a:srgbClr val="AEBBD0"/>
+                </a:solidFill>
+                <a:latin typeface="Segoe UI" pitchFamily="34" charset="0"/>
+                <a:ea typeface="Segoe UI" pitchFamily="34" charset="-122"/>
+                <a:cs typeface="Segoe UI" pitchFamily="34" charset="-120"/>
+              </a:rPr>
+              <a:t>Drives real Chrome, Firefox and Safari.</a:t>
+            </a:r>
+            <a:endParaRPr lang="en-US" sz="1000" dirty="0"/>
+          </a:p>
+        </p:txBody>
+      </p:sp>
+      <p:sp>
+        <p:nvSpPr>
+          <p:cNvPr id="21" name="Text 21"/>
+          <p:cNvSpPr/>
+          <p:nvPr/>
+        </p:nvSpPr>
+        <p:spPr>
+          <a:xfrm>
+            <a:off x="4892040" y="2633472"/>
+            <a:ext cx="3584448" cy="237744"/>
+          </a:xfrm>
+          <a:prstGeom prst="rect">
+            <a:avLst/>
+          </a:prstGeom>
+          <a:noFill/>
+          <a:ln/>
+        </p:spPr>
+        <p:txBody>
+          <a:bodyPr wrap="square" rtlCol="0" anchor="t"/>
+          <a:lstStyle/>
+          <a:p>
+            <a:pPr indent="0" marL="0">
+              <a:buNone/>
+            </a:pPr>
+            <a:r>
+              <a:rPr lang="en-US" sz="1250" b="1" dirty="0">
+                <a:solidFill>
+                  <a:srgbClr val="F5F8FC"/>
+                </a:solidFill>
+                <a:latin typeface="Segoe UI" pitchFamily="34" charset="0"/>
+                <a:ea typeface="Segoe UI" pitchFamily="34" charset="-122"/>
+                <a:cs typeface="Segoe UI" pitchFamily="34" charset="-120"/>
+              </a:rPr>
+              <a:t>Cucumber (Gherkin)</a:t>
+            </a:r>
+            <a:endParaRPr lang="en-US" sz="1250" dirty="0"/>
+          </a:p>
+        </p:txBody>
+      </p:sp>
+      <p:sp>
+        <p:nvSpPr>
+          <p:cNvPr id="22" name="Text 22"/>
+          <p:cNvSpPr/>
+          <p:nvPr/>
+        </p:nvSpPr>
+        <p:spPr>
+          <a:xfrm>
+            <a:off x="4892040" y="2880360"/>
+            <a:ext cx="3584448" cy="292608"/>
+          </a:xfrm>
+          <a:prstGeom prst="rect">
+            <a:avLst/>
+          </a:prstGeom>
+          <a:noFill/>
+          <a:ln/>
+        </p:spPr>
+        <p:txBody>
+          <a:bodyPr wrap="square" rtlCol="0" anchor="t"/>
+          <a:lstStyle/>
+          <a:p>
+            <a:pPr indent="0" marL="0">
+              <a:lnSpc>
+                <a:spcPct val="110000"/>
+              </a:lnSpc>
+              <a:buNone/>
+            </a:pPr>
+            <a:r>
+              <a:rPr lang="en-US" sz="1000" dirty="0">
+                <a:solidFill>
+                  <a:srgbClr val="AEBBD0"/>
+                </a:solidFill>
+                <a:latin typeface="Segoe UI" pitchFamily="34" charset="0"/>
+                <a:ea typeface="Segoe UI" pitchFamily="34" charset="-122"/>
+                <a:cs typeface="Segoe UI" pitchFamily="34" charset="-120"/>
+              </a:rPr>
+              <a:t>Tests written in plain English.</a:t>
+            </a:r>
+            <a:endParaRPr lang="en-US" sz="1000" dirty="0"/>
+          </a:p>
+        </p:txBody>
+      </p:sp>
+      <p:sp>
+        <p:nvSpPr>
+          <p:cNvPr id="23" name="Text 23"/>
+          <p:cNvSpPr/>
+          <p:nvPr/>
+        </p:nvSpPr>
+        <p:spPr>
+          <a:xfrm>
+            <a:off x="4892040" y="3218688"/>
+            <a:ext cx="3584448" cy="237744"/>
+          </a:xfrm>
+          <a:prstGeom prst="rect">
+            <a:avLst/>
+          </a:prstGeom>
+          <a:noFill/>
+          <a:ln/>
+        </p:spPr>
+        <p:txBody>
+          <a:bodyPr wrap="square" rtlCol="0" anchor="t"/>
+          <a:lstStyle/>
+          <a:p>
+            <a:pPr indent="0" marL="0">
+              <a:buNone/>
+            </a:pPr>
+            <a:r>
+              <a:rPr lang="en-US" sz="1250" b="1" dirty="0">
+                <a:solidFill>
+                  <a:srgbClr val="F5F8FC"/>
+                </a:solidFill>
+                <a:latin typeface="Segoe UI" pitchFamily="34" charset="0"/>
+                <a:ea typeface="Segoe UI" pitchFamily="34" charset="-122"/>
+                <a:cs typeface="Segoe UI" pitchFamily="34" charset="-120"/>
+              </a:rPr>
+              <a:t>Playwright MCP</a:t>
+            </a:r>
+            <a:endParaRPr lang="en-US" sz="1250" dirty="0"/>
+          </a:p>
+        </p:txBody>
+      </p:sp>
+      <p:sp>
+        <p:nvSpPr>
+          <p:cNvPr id="24" name="Text 24"/>
+          <p:cNvSpPr/>
+          <p:nvPr/>
+        </p:nvSpPr>
+        <p:spPr>
+          <a:xfrm>
+            <a:off x="4892040" y="3465576"/>
+            <a:ext cx="3584448" cy="292608"/>
+          </a:xfrm>
+          <a:prstGeom prst="rect">
+            <a:avLst/>
+          </a:prstGeom>
+          <a:noFill/>
+          <a:ln/>
+        </p:spPr>
+        <p:txBody>
+          <a:bodyPr wrap="square" rtlCol="0" anchor="t"/>
+          <a:lstStyle/>
+          <a:p>
+            <a:pPr indent="0" marL="0">
+              <a:lnSpc>
+                <a:spcPct val="110000"/>
+              </a:lnSpc>
+              <a:buNone/>
+            </a:pPr>
+            <a:r>
+              <a:rPr lang="en-US" sz="1000" dirty="0">
+                <a:solidFill>
+                  <a:srgbClr val="AEBBD0"/>
+                </a:solidFill>
+                <a:latin typeface="Segoe UI" pitchFamily="34" charset="0"/>
+                <a:ea typeface="Segoe UI" pitchFamily="34" charset="-122"/>
+                <a:cs typeface="Segoe UI" pitchFamily="34" charset="-120"/>
+              </a:rPr>
+              <a:t>Lets the AI open a browser itself.</a:t>
+            </a:r>
+            <a:endParaRPr lang="en-US" sz="1000" dirty="0"/>
+          </a:p>
+        </p:txBody>
+      </p:sp>
+      <p:sp>
+        <p:nvSpPr>
+          <p:cNvPr id="25" name="Text 25"/>
+          <p:cNvSpPr/>
+          <p:nvPr/>
+        </p:nvSpPr>
+        <p:spPr>
+          <a:xfrm>
+            <a:off x="4892040" y="3803904"/>
+            <a:ext cx="3584448" cy="237744"/>
+          </a:xfrm>
+          <a:prstGeom prst="rect">
+            <a:avLst/>
+          </a:prstGeom>
+          <a:noFill/>
+          <a:ln/>
+        </p:spPr>
+        <p:txBody>
+          <a:bodyPr wrap="square" rtlCol="0" anchor="t"/>
+          <a:lstStyle/>
+          <a:p>
+            <a:pPr indent="0" marL="0">
+              <a:buNone/>
+            </a:pPr>
+            <a:r>
+              <a:rPr lang="en-US" sz="1250" b="1" dirty="0">
+                <a:solidFill>
+                  <a:srgbClr val="F5F8FC"/>
+                </a:solidFill>
+                <a:latin typeface="Segoe UI" pitchFamily="34" charset="0"/>
+                <a:ea typeface="Segoe UI" pitchFamily="34" charset="-122"/>
+                <a:cs typeface="Segoe UI" pitchFamily="34" charset="-120"/>
+              </a:rPr>
+              <a:t>Allure and Excel</a:t>
+            </a:r>
+            <a:endParaRPr lang="en-US" sz="1250" dirty="0"/>
+          </a:p>
+        </p:txBody>
+      </p:sp>
+      <p:sp>
+        <p:nvSpPr>
+          <p:cNvPr id="26" name="Text 26"/>
+          <p:cNvSpPr/>
+          <p:nvPr/>
+        </p:nvSpPr>
+        <p:spPr>
+          <a:xfrm>
+            <a:off x="4892040" y="4050792"/>
+            <a:ext cx="3584448" cy="292608"/>
+          </a:xfrm>
+          <a:prstGeom prst="rect">
+            <a:avLst/>
+          </a:prstGeom>
+          <a:noFill/>
+          <a:ln/>
+        </p:spPr>
+        <p:txBody>
+          <a:bodyPr wrap="square" rtlCol="0" anchor="t"/>
+          <a:lstStyle/>
+          <a:p>
+            <a:pPr indent="0" marL="0">
+              <a:lnSpc>
+                <a:spcPct val="110000"/>
+              </a:lnSpc>
+              <a:buNone/>
+            </a:pPr>
+            <a:r>
+              <a:rPr lang="en-US" sz="1000" dirty="0">
+                <a:solidFill>
+                  <a:srgbClr val="AEBBD0"/>
+                </a:solidFill>
+                <a:latin typeface="Segoe UI" pitchFamily="34" charset="0"/>
+                <a:ea typeface="Segoe UI" pitchFamily="34" charset="-122"/>
+                <a:cs typeface="Segoe UI" pitchFamily="34" charset="-120"/>
+              </a:rPr>
+              <a:t>Reports for engineers and managers.</a:t>
+            </a:r>
+            <a:endParaRPr lang="en-US" sz="1000" dirty="0"/>
+          </a:p>
+        </p:txBody>
+      </p:sp>
+      <p:sp>
+        <p:nvSpPr>
+          <p:cNvPr id="27" name="Text 27"/>
+          <p:cNvSpPr/>
+          <p:nvPr/>
+        </p:nvSpPr>
+        <p:spPr>
+          <a:xfrm>
+            <a:off x="411480" y="4846320"/>
+            <a:ext cx="2743200" cy="228600"/>
+          </a:xfrm>
+          <a:prstGeom prst="rect">
+            <a:avLst/>
+          </a:prstGeom>
+          <a:noFill/>
+          <a:ln/>
+        </p:spPr>
+        <p:txBody>
+          <a:bodyPr wrap="square" rtlCol="0" anchor="ctr"/>
+          <a:lstStyle/>
+          <a:p>
+            <a:pPr indent="0" marL="0">
+              <a:buNone/>
+            </a:pPr>
+            <a:r>
+              <a:rPr lang="en-US" sz="850" dirty="0">
+                <a:solidFill>
+                  <a:srgbClr val="76839B"/>
+                </a:solidFill>
+                <a:latin typeface="Segoe UI" pitchFamily="34" charset="0"/>
+                <a:ea typeface="Segoe UI" pitchFamily="34" charset="-122"/>
+                <a:cs typeface="Segoe UI" pitchFamily="34" charset="-120"/>
+              </a:rPr>
+              <a:t>Agentic QA Pipeline</a:t>
+            </a:r>
+            <a:endParaRPr lang="en-US" sz="850" dirty="0"/>
+          </a:p>
+        </p:txBody>
+      </p:sp>
+      <p:sp>
+        <p:nvSpPr>
+          <p:cNvPr id="28" name="Text 28"/>
+          <p:cNvSpPr/>
+          <p:nvPr/>
+        </p:nvSpPr>
+        <p:spPr>
+          <a:xfrm>
+            <a:off x="8138160" y="4846320"/>
+            <a:ext cx="594360" cy="228600"/>
+          </a:xfrm>
+          <a:prstGeom prst="rect">
+            <a:avLst/>
+          </a:prstGeom>
+          <a:noFill/>
+          <a:ln/>
+        </p:spPr>
+        <p:txBody>
+          <a:bodyPr wrap="square" rtlCol="0" anchor="ctr"/>
+          <a:lstStyle/>
+          <a:p>
+            <a:pPr indent="0" marL="0" algn="r">
+              <a:buNone/>
+            </a:pPr>
+            <a:r>
+              <a:rPr lang="en-US" sz="850" dirty="0">
+                <a:solidFill>
+                  <a:srgbClr val="76839B"/>
+                </a:solidFill>
+                <a:latin typeface="Consolas" pitchFamily="34" charset="0"/>
+                <a:ea typeface="Consolas" pitchFamily="34" charset="-122"/>
+                <a:cs typeface="Consolas" pitchFamily="34" charset="-120"/>
+              </a:rPr>
+              <a:t>8 / 9</a:t>
             </a:r>
             <a:endParaRPr lang="en-US" sz="850" dirty="0"/>
           </a:p>
